--- a/fpga/sw/export/docs/slides/04_Post-quantum_EDHOC.pptx
+++ b/fpga/sw/export/docs/slides/04_Post-quantum_EDHOC.pptx
@@ -23739,7 +23739,7 @@
                 </a:solidFill>
                 <a:latin typeface="Consolas"/>
               </a:rPr>
-              <a:t>akTBD3 PASS hs=1.241956s stack_i=18592 stack_r=16368 prk=match 23s</a:t>
+              <a:t>akTBD3 PASS hs=1.239387s stack_i=18592 stack_r=16368 prk=- 23s</a:t>
             </a:r>
           </a:p>
         </p:txBody>
@@ -27709,7 +27709,7 @@
                           </a:solidFill>
                           <a:latin typeface="Times New Roman"/>
                         </a:rPr>
-                        <a:t>PASS, prk=match</a:t>
+                        <a:t>PASS; prk=match with DEBUG=1 builds</a:t>
                       </a:r>
                     </a:p>
                   </a:txBody>
@@ -29634,7 +29634,7 @@
                 </a:solidFill>
                 <a:latin typeface="Times New Roman"/>
               </a:rPr>
-              <a:t>), rebuild both roles, rerun: PASS, prk=match.</a:t>
+              <a:t>), rebuild both roles, rerun: PASS.</a:t>
             </a:r>
           </a:p>
           <a:p>

--- a/fpga/sw/export/docs/slides/04_Post-quantum_EDHOC.pptx
+++ b/fpga/sw/export/docs/slides/04_Post-quantum_EDHOC.pptx
@@ -30295,7 +30295,7 @@
                 <a:latin typeface="Times New Roman"/>
                 <a:ea typeface="DejaVu Sans"/>
               </a:rPr>
-              <a:t>[YYYY/MM]</a:t>
+              <a:t>2026/12</a:t>
             </a:r>
             <a:endParaRPr lang="en-US" sz="3200" b="0" strike="noStrike" spc="-1" dirty="0">
               <a:latin typeface="Arial"/>
@@ -30459,7 +30459,7 @@
                 <a:latin typeface="Times New Roman"/>
                 <a:ea typeface="DejaVu Sans"/>
               </a:rPr>
-              <a:t>[YYYY/MM]</a:t>
+              <a:t>2026/12</a:t>
             </a:r>
             <a:endParaRPr lang="en-US" sz="3200" b="0" strike="noStrike" spc="-1" dirty="0">
               <a:latin typeface="Arial"/>
@@ -30561,7 +30561,7 @@
                 <a:latin typeface="Times New Roman"/>
                 <a:ea typeface="DejaVu Sans"/>
               </a:rPr>
-              <a:t>[Course name]</a:t>
+              <a:t>EDHOC on a Rocket RV64 SoC</a:t>
             </a:r>
             <a:r>
               <a:rPr lang="en-US" sz="4800" spc="-1" dirty="0">
@@ -30786,7 +30786,7 @@
                 <a:latin typeface="Times New Roman" panose="02020603050405020304" pitchFamily="18" charset="0"/>
                 <a:cs typeface="Times New Roman" panose="02020603050405020304" pitchFamily="18" charset="0"/>
               </a:rPr>
-              <a:t>[Author]</a:t>
+              <a:t>Khai-Duy Nguyen</a:t>
             </a:r>
           </a:p>
         </p:txBody>

--- a/fpga/sw/export/docs/slides/04_Post-quantum_EDHOC.pptx
+++ b/fpga/sw/export/docs/slides/04_Post-quantum_EDHOC.pptx
@@ -20584,18 +20584,18 @@
               </a:buClr>
             </a:pPr>
             <a:r>
-              <a:rPr lang="en-US" sz="2400" b="1" spc="-1" dirty="0">
+              <a:rPr lang="en-US" sz="3000" b="1" spc="-1" dirty="0">
                 <a:latin typeface="Times New Roman" panose="02020603050405020304" pitchFamily="18" charset="0"/>
                 <a:cs typeface="Times New Roman" panose="02020603050405020304" pitchFamily="18" charset="0"/>
               </a:rPr>
               <a:t>2. The AuthKEM Protocol </a:t>
             </a:r>
             <a:r>
-              <a:rPr lang="en-US" sz="2400" spc="-1" dirty="0">
+              <a:rPr lang="en-US" sz="3000" spc="-1" dirty="0">
                 <a:latin typeface="Times New Roman" panose="02020603050405020304" pitchFamily="18" charset="0"/>
                 <a:cs typeface="Times New Roman" panose="02020603050405020304" pitchFamily="18" charset="0"/>
               </a:rPr>
-              <a:t>(10/11) Where the draft is unclear — and what we chose</a:t>
+              <a:t>(10/11) Draft rules this code follows</a:t>
             </a:r>
           </a:p>
         </p:txBody>
@@ -20740,7 +20740,7 @@
                           </a:solidFill>
                           <a:latin typeface="Times New Roman"/>
                         </a:rPr>
-                        <a:t>Chosen</a:t>
+                        <a:t>This code uses</a:t>
                       </a:r>
                     </a:p>
                   </a:txBody>
@@ -21206,7 +21206,7 @@
                 </a:solidFill>
                 <a:latin typeface="Times New Roman"/>
               </a:rPr>
-              <a:t>, Python, written from the draft text) recomputes every hash, key, MAC and PRK_out from the bytes our firmware sent.</a:t>
+              <a:t>, Python, written from the draft text) recomputes every hash, key, MAC and PRK_out from the bytes the firmware sent.</a:t>
             </a:r>
           </a:p>
           <a:p>
@@ -23177,7 +23177,25 @@
                 </a:solidFill>
                 <a:latin typeface="Times New Roman"/>
               </a:rPr>
-              <a:t>Answers the question “is there an option combining AES-256 and ML-KEM-1024?” — yes, and it runs on the board (section 5).</a:t>
+              <a:t>Run it with </a:t>
+            </a:r>
+            <a:r>
+              <a:rPr sz="1700" b="0">
+                <a:solidFill>
+                  <a:srgbClr val="8B1A1A"/>
+                </a:solidFill>
+                <a:latin typeface="Consolas"/>
+              </a:rPr>
+              <a:t>SUITE=TBD3</a:t>
+            </a:r>
+            <a:r>
+              <a:rPr sz="1900" b="0">
+                <a:solidFill>
+                  <a:srgbClr val="000000"/>
+                </a:solidFill>
+                <a:latin typeface="Times New Roman"/>
+              </a:rPr>
+              <a:t> (section 4, (4/4)); its results are in section 5. Choose it when you want AES-256 and ML-KEM-1024 together.</a:t>
             </a:r>
           </a:p>
         </p:txBody>
@@ -24298,18 +24316,18 @@
               </a:buClr>
             </a:pPr>
             <a:r>
-              <a:rPr lang="en-US" sz="3600" b="1" spc="-1" dirty="0">
+              <a:rPr lang="en-US" sz="3200" b="1" spc="-1" dirty="0">
                 <a:latin typeface="Times New Roman" panose="02020603050405020304" pitchFamily="18" charset="0"/>
                 <a:cs typeface="Times New Roman" panose="02020603050405020304" pitchFamily="18" charset="0"/>
               </a:rPr>
               <a:t>4. Fitting in 64 KiB </a:t>
             </a:r>
             <a:r>
-              <a:rPr lang="en-US" sz="3600" spc="-1" dirty="0">
+              <a:rPr lang="en-US" sz="3200" spc="-1" dirty="0">
                 <a:latin typeface="Times New Roman" panose="02020603050405020304" pitchFamily="18" charset="0"/>
                 <a:cs typeface="Times New Roman" panose="02020603050405020304" pitchFamily="18" charset="0"/>
               </a:rPr>
-              <a:t>(1/4) The stack problem</a:t>
+              <a:t>(1/4) The low-RAM ML-KEM build option</a:t>
             </a:r>
           </a:p>
         </p:txBody>
@@ -24407,7 +24425,7 @@
                 </a:solidFill>
                 <a:latin typeface="Times New Roman"/>
               </a:rPr>
-              <a:t>ML-KEM-1024 decapsulation in the reference code needs </a:t>
+              <a:t>ML-KEM-1024 decapsulation in plain mlkem-native needs </a:t>
             </a:r>
             <a:r>
               <a:rPr sz="1900" b="1">
@@ -24425,7 +24443,7 @@
                 </a:solidFill>
                 <a:latin typeface="Times New Roman"/>
               </a:rPr>
-              <a:t>: it builds the whole 4 × 4 matrix of polynomials, then re-encrypts to check the ciphertext.</a:t>
+              <a:t>: it builds the whole 4 × 4 matrix of polynomials, then re-encrypts to check the ciphertext. With the 37.7 KB TBD3 image that is more than 64 KiB.</a:t>
             </a:r>
           </a:p>
           <a:p>
@@ -24442,7 +24460,86 @@
                 </a:solidFill>
                 <a:latin typeface="Times New Roman"/>
               </a:rPr>
-              <a:t>Image (≈ 37.6 KB) + 34 kB stack &gt; 64 KiB → TBD3 did not fit.</a:t>
+              <a:t>So </a:t>
+            </a:r>
+            <a:r>
+              <a:rPr sz="1900" b="0" i="1">
+                <a:solidFill>
+                  <a:srgbClr val="000000"/>
+                </a:solidFill>
+                <a:latin typeface="Times New Roman"/>
+              </a:rPr>
+              <a:t>mk/config.mk</a:t>
+            </a:r>
+            <a:r>
+              <a:rPr sz="1900" b="0">
+                <a:solidFill>
+                  <a:srgbClr val="000000"/>
+                </a:solidFill>
+                <a:latin typeface="Times New Roman"/>
+              </a:rPr>
+              <a:t> always compiles mlkem-native with </a:t>
+            </a:r>
+            <a:r>
+              <a:rPr sz="1700" b="0">
+                <a:solidFill>
+                  <a:srgbClr val="8B1A1A"/>
+                </a:solidFill>
+                <a:latin typeface="Consolas"/>
+              </a:rPr>
+              <a:t>MLK_CONFIG_LOW_RAM</a:t>
+            </a:r>
+            <a:r>
+              <a:rPr sz="1900" b="0">
+                <a:solidFill>
+                  <a:srgbClr val="000000"/>
+                </a:solidFill>
+                <a:latin typeface="Times New Roman"/>
+              </a:rPr>
+              <a:t>, a local option in this tree's copy:</a:t>
+            </a:r>
+          </a:p>
+          <a:p>
+            <a:pPr marL="548640" indent="-219456">
+              <a:spcAft>
+                <a:spcPts val="400"/>
+              </a:spcAft>
+              <a:buChar char="–"/>
+            </a:pPr>
+            <a:r>
+              <a:rPr sz="1700" b="0">
+                <a:solidFill>
+                  <a:srgbClr val="000000"/>
+                </a:solidFill>
+                <a:latin typeface="Times New Roman"/>
+              </a:rPr>
+              <a:t>generate and use the matrix </a:t>
+            </a:r>
+            <a:r>
+              <a:rPr sz="1700" b="1">
+                <a:solidFill>
+                  <a:srgbClr val="000000"/>
+                </a:solidFill>
+                <a:latin typeface="Times New Roman"/>
+              </a:rPr>
+              <a:t>one row at a time</a:t>
+            </a:r>
+          </a:p>
+          <a:p>
+            <a:pPr marL="548640" indent="-219456">
+              <a:spcAft>
+                <a:spcPts val="400"/>
+              </a:spcAft>
+              <a:buChar char="–"/>
+            </a:pPr>
+            <a:r>
+              <a:rPr sz="1700" b="0">
+                <a:solidFill>
+                  <a:srgbClr val="000000"/>
+                </a:solidFill>
+                <a:latin typeface="Times New Roman"/>
+              </a:rPr>
+              <a:t>keep the decryption step in its own function, so its buffers are freed before re-encryption</a:t>
             </a:r>
           </a:p>
           <a:p>
@@ -24459,16 +24556,16 @@
                 </a:solidFill>
                 <a:latin typeface="Times New Roman"/>
               </a:rPr>
-              <a:t>Fix: a local option in our mlkem-native copy, </a:t>
-            </a:r>
-            <a:r>
-              <a:rPr sz="1700" b="0">
-                <a:solidFill>
-                  <a:srgbClr val="8B1A1A"/>
-                </a:solidFill>
-                <a:latin typeface="Consolas"/>
-              </a:rPr>
-              <a:t>MLK_CONFIG_LOW_RAM</a:t>
+              <a:t>Expect </a:t>
+            </a:r>
+            <a:r>
+              <a:rPr sz="1900" b="1">
+                <a:solidFill>
+                  <a:srgbClr val="000000"/>
+                </a:solidFill>
+                <a:latin typeface="Times New Roman"/>
+              </a:rPr>
+              <a:t>18.8 kB</a:t>
             </a:r>
             <a:r>
               <a:rPr sz="1900" b="0">
@@ -24477,50 +24574,7 @@
                 </a:solidFill>
                 <a:latin typeface="Times New Roman"/>
               </a:rPr>
-              <a:t>:</a:t>
-            </a:r>
-          </a:p>
-          <a:p>
-            <a:pPr marL="548640" indent="-219456">
-              <a:spcAft>
-                <a:spcPts val="400"/>
-              </a:spcAft>
-              <a:buChar char="–"/>
-            </a:pPr>
-            <a:r>
-              <a:rPr sz="1700" b="0">
-                <a:solidFill>
-                  <a:srgbClr val="000000"/>
-                </a:solidFill>
-                <a:latin typeface="Times New Roman"/>
-              </a:rPr>
-              <a:t>generate and use the matrix </a:t>
-            </a:r>
-            <a:r>
-              <a:rPr sz="1700" b="1">
-                <a:solidFill>
-                  <a:srgbClr val="000000"/>
-                </a:solidFill>
-                <a:latin typeface="Times New Roman"/>
-              </a:rPr>
-              <a:t>one row at a time</a:t>
-            </a:r>
-          </a:p>
-          <a:p>
-            <a:pPr marL="548640" indent="-219456">
-              <a:spcAft>
-                <a:spcPts val="400"/>
-              </a:spcAft>
-              <a:buChar char="–"/>
-            </a:pPr>
-            <a:r>
-              <a:rPr sz="1700" b="0">
-                <a:solidFill>
-                  <a:srgbClr val="000000"/>
-                </a:solidFill>
-                <a:latin typeface="Times New Roman"/>
-              </a:rPr>
-              <a:t>keep the decryption step in its own function, so its buffers are freed before re-encryption</a:t>
+              <a:t> for ML-KEM-1024 decapsulation and the same outputs: the FIPS 203 known-answer tests of Lesson 2 PASS with it.</a:t>
             </a:r>
           </a:p>
           <a:p>
@@ -24537,25 +24591,7 @@
                 </a:solidFill>
                 <a:latin typeface="Times New Roman"/>
               </a:rPr>
-              <a:t>Result: </a:t>
-            </a:r>
-            <a:r>
-              <a:rPr sz="1900" b="1">
-                <a:solidFill>
-                  <a:srgbClr val="000000"/>
-                </a:solidFill>
-                <a:latin typeface="Times New Roman"/>
-              </a:rPr>
-              <a:t>18.8 kB</a:t>
-            </a:r>
-            <a:r>
-              <a:rPr sz="1900" b="0">
-                <a:solidFill>
-                  <a:srgbClr val="000000"/>
-                </a:solidFill>
-                <a:latin typeface="Times New Roman"/>
-              </a:rPr>
-              <a:t> for ML-KEM-1024 decapsulation. Outputs are bit-identical (the FIPS 203 known-answer tests of Lesson 2 still PASS).</a:t>
+              <a:t>See the difference yourself: Exercise 3 builds TBD3 without the option.</a:t>
             </a:r>
           </a:p>
         </p:txBody>
@@ -31355,7 +31391,7 @@
                 </a:solidFill>
                 <a:latin typeface="Times New Roman"/>
               </a:rPr>
-              <a:t>Exercise 2: the model's output before and after your change; which draft sentence supports the reading we chose.</a:t>
+              <a:t>Exercise 2: the model's output before and after your change; which draft sentence supports the reading this code uses.</a:t>
             </a:r>
           </a:p>
           <a:p>

--- a/fpga/sw/export/docs/slides/04_Post-quantum_EDHOC.pptx
+++ b/fpga/sw/export/docs/slides/04_Post-quantum_EDHOC.pptx
@@ -22828,7 +22828,25 @@
                 </a:solidFill>
                 <a:latin typeface="Times New Roman"/>
               </a:rPr>
-              <a:t>One suite per image: </a:t>
+              <a:t>One suite per image: TBD2 (default) → </a:t>
+            </a:r>
+            <a:r>
+              <a:rPr sz="1800" b="0" i="1">
+                <a:solidFill>
+                  <a:srgbClr val="000000"/>
+                </a:solidFill>
+                <a:latin typeface="Times New Roman"/>
+              </a:rPr>
+              <a:t>build/</a:t>
+            </a:r>
+            <a:r>
+              <a:rPr sz="1800" b="0">
+                <a:solidFill>
+                  <a:srgbClr val="000000"/>
+                </a:solidFill>
+                <a:latin typeface="Times New Roman"/>
+              </a:rPr>
+              <a:t>; </a:t>
             </a:r>
             <a:r>
               <a:rPr sz="1600" b="0">
@@ -22837,7 +22855,7 @@
                 </a:solidFill>
                 <a:latin typeface="Consolas"/>
               </a:rPr>
-              <a:t>make … SUITE=TBD3</a:t>
+              <a:t>SUITE=TBD1</a:t>
             </a:r>
             <a:r>
               <a:rPr sz="1800" b="0">
@@ -22846,7 +22864,43 @@
                 </a:solidFill>
                 <a:latin typeface="Times New Roman"/>
               </a:rPr>
+              <a:t> / </a:t>
+            </a:r>
+            <a:r>
+              <a:rPr sz="1600" b="0">
+                <a:solidFill>
+                  <a:srgbClr val="8B1A1A"/>
+                </a:solidFill>
+                <a:latin typeface="Consolas"/>
+              </a:rPr>
+              <a:t>SUITE=TBD3</a:t>
+            </a:r>
+            <a:r>
+              <a:rPr sz="1800" b="0">
+                <a:solidFill>
+                  <a:srgbClr val="000000"/>
+                </a:solidFill>
+                <a:latin typeface="Times New Roman"/>
+              </a:rPr>
               <a:t> → </a:t>
+            </a:r>
+            <a:r>
+              <a:rPr sz="1800" b="0" i="1">
+                <a:solidFill>
+                  <a:srgbClr val="000000"/>
+                </a:solidFill>
+                <a:latin typeface="Times New Roman"/>
+              </a:rPr>
+              <a:t>build-tbd1/</a:t>
+            </a:r>
+            <a:r>
+              <a:rPr sz="1800" b="0">
+                <a:solidFill>
+                  <a:srgbClr val="000000"/>
+                </a:solidFill>
+                <a:latin typeface="Times New Roman"/>
+              </a:rPr>
+              <a:t> / </a:t>
             </a:r>
             <a:r>
               <a:rPr sz="1800" b="0" i="1">
@@ -25591,7 +25645,7 @@
                 </a:solidFill>
                 <a:latin typeface="Times New Roman"/>
               </a:rPr>
-              <a:t>Largest build per suite (initiator), bytes.</a:t>
+              <a:t>Largest build per suite (initiator), section bytes + stack reserve. Default flags: demo, radio; no TIMING / DEBUG / APP options. Alignment adds padding; the linker makes the final fit check.</a:t>
             </a:r>
           </a:p>
           <a:p>
@@ -26211,7 +26265,7 @@
                 </a:solidFill>
                 <a:latin typeface="Times New Roman"/>
               </a:rPr>
-              <a:t>Board: same scripts as Lesson 3. PC: unit tests, loopback, and the independent model.</a:t>
+              <a:t>Build folders: TBD2 (default) → build/, TBD1 → build-tbd1/, TBD3 → build-tbd3/. Board: same scripts as Lesson 3.</a:t>
             </a:r>
           </a:p>
         </p:txBody>

--- a/fpga/sw/export/docs/slides/04_Post-quantum_EDHOC.pptx
+++ b/fpga/sw/export/docs/slides/04_Post-quantum_EDHOC.pptx
@@ -25901,7 +25901,7 @@
                 </a:solidFill>
                 <a:latin typeface="Consolas"/>
               </a:rPr>
-              <a:t>Run this — from the repository root</a:t>
+              <a:t>Run this</a:t>
             </a:r>
           </a:p>
           <a:p>
@@ -25917,7 +25917,7 @@
                 </a:solidFill>
                 <a:latin typeface="Consolas"/>
               </a:rPr>
-              <a:t>cd fpga/sw/export/edhoc-authkem</a:t>
+              <a:t>cd $REPO/fpga/sw/export/edhoc-authkem</a:t>
             </a:r>
           </a:p>
           <a:p>
@@ -26050,7 +26050,7 @@
         <p:spPr>
           <a:xfrm>
             <a:off x="365760" y="3023107"/>
-            <a:ext cx="11430000" cy="1068832"/>
+            <a:ext cx="11430000" cy="1097280"/>
           </a:xfrm>
           <a:prstGeom prst="rect">
             <a:avLst/>
@@ -26085,13 +26085,13 @@
           <a:p>
             <a:pPr algn="l"/>
             <a:r>
-              <a:rPr sz="1400" b="1">
+              <a:rPr sz="983" b="1">
                 <a:solidFill>
                   <a:srgbClr val="808080"/>
                 </a:solidFill>
                 <a:latin typeface="Consolas"/>
               </a:rPr>
-              <a:t>Run this — then, still in fpga/sw/export/edhoc-authkem, on the PC</a:t>
+              <a:t>Run this — on the PC</a:t>
             </a:r>
           </a:p>
           <a:p>
@@ -26101,13 +26101,13 @@
               </a:lnSpc>
             </a:pPr>
             <a:r>
-              <a:rPr sz="1400">
+              <a:rPr sz="983">
                 <a:solidFill>
                   <a:srgbClr val="1F1F1F"/>
                 </a:solidFill>
                 <a:latin typeface="Consolas"/>
               </a:rPr>
-              <a:t>make unit-test SUITE=TBD2        # suite gate, KEM, CBOR codecs, error messages</a:t>
+              <a:t>cd $REPO/fpga/sw/export/edhoc-authkem</a:t>
             </a:r>
           </a:p>
           <a:p>
@@ -26117,13 +26117,13 @@
               </a:lnSpc>
             </a:pPr>
             <a:r>
-              <a:rPr sz="1400">
+              <a:rPr sz="983">
                 <a:solidFill>
                   <a:srgbClr val="1F1F1F"/>
                 </a:solidFill>
                 <a:latin typeface="Consolas"/>
               </a:rPr>
-              <a:t>make loopback-test SUITE=TBD3 LOOPBACK_LOG=build/loopback.txt</a:t>
+              <a:t>source ~/edhoc-venv/bin/activate   # Python packages of Lesson 1, (7/12)</a:t>
             </a:r>
           </a:p>
           <a:p>
@@ -26133,7 +26133,39 @@
               </a:lnSpc>
             </a:pPr>
             <a:r>
-              <a:rPr sz="1400">
+              <a:rPr sz="983">
+                <a:solidFill>
+                  <a:srgbClr val="1F1F1F"/>
+                </a:solidFill>
+                <a:latin typeface="Consolas"/>
+              </a:rPr>
+              <a:t>make unit-test SUITE=TBD2        # suite gate, KEM, CBOR codecs, error messages</a:t>
+            </a:r>
+          </a:p>
+          <a:p>
+            <a:pPr algn="l">
+              <a:lnSpc>
+                <a:spcPct val="100000"/>
+              </a:lnSpc>
+            </a:pPr>
+            <a:r>
+              <a:rPr sz="983">
+                <a:solidFill>
+                  <a:srgbClr val="1F1F1F"/>
+                </a:solidFill>
+                <a:latin typeface="Consolas"/>
+              </a:rPr>
+              <a:t>make loopback-test SUITE=TBD3 LOOPBACK_LOG=build/loopback.txt</a:t>
+            </a:r>
+          </a:p>
+          <a:p>
+            <a:pPr algn="l">
+              <a:lnSpc>
+                <a:spcPct val="100000"/>
+              </a:lnSpc>
+            </a:pPr>
+            <a:r>
+              <a:rPr sz="983">
                 <a:solidFill>
                   <a:srgbClr val="1F1F1F"/>
                 </a:solidFill>
@@ -26152,7 +26184,7 @@
         </p:nvSpPr>
         <p:spPr>
           <a:xfrm>
-            <a:off x="365760" y="4183379"/>
+            <a:off x="365760" y="4211826"/>
             <a:ext cx="11430000" cy="731520"/>
           </a:xfrm>
           <a:prstGeom prst="rect">
@@ -26239,7 +26271,7 @@
         </p:nvSpPr>
         <p:spPr>
           <a:xfrm>
-            <a:off x="365760" y="5189219"/>
+            <a:off x="365760" y="5217666"/>
             <a:ext cx="11430000" cy="731520"/>
           </a:xfrm>
           <a:prstGeom prst="rect">
